--- a/exports/pptx/lessons/senior-module-05-dot-addition/day-08-project-session-1.pptx
+++ b/exports/pptx/lessons/senior-module-05-dot-addition/day-08-project-session-1.pptx
@@ -15,9 +15,10 @@
     <p:sldId id="263" r:id="rId9"/>
     <p:sldId id="264" r:id="rId10"/>
     <p:sldId id="265" r:id="rId11"/>
+    <p:sldId id="266" r:id="rId12"/>
   </p:sldIdLst>
   <p:notesMasterIdLst>
-    <p:notesMasterId r:id="rId12"/>
+    <p:notesMasterId r:id="rId13"/>
   </p:notesMasterIdLst>
   <p:sldSz cx="9144000" cy="5143500"/>
   <p:notesSz cx="5143500" cy="9144000"/>
@@ -623,6 +624,94 @@
             <a:fld id="{F7021451-1387-4CA6-816F-3879F97B5CBC}" type="slidenum">
               <a:rPr lang="en-US"/>
               <a:t>10</a:t>
+            </a:fld>
+            <a:endParaRPr lang="en-US"/>
+          </a:p>
+        </p:txBody>
+      </p:sp>
+    </p:spTree>
+    <p:extLst>
+      <p:ext uri="{BB962C8B-B14F-4D97-AF65-F5344CB8AC3E}">
+        <p14:creationId xmlns:p14="http://schemas.microsoft.com/office/powerpoint/2010/main" val="1024086991"/>
+      </p:ext>
+    </p:extLst>
+  </p:cSld>
+  <p:clrMapOvr>
+    <a:masterClrMapping/>
+  </p:clrMapOvr>
+</p:notes>
+</file>
+
+<file path=ppt/notesSlides/notesSlide11.xml><?xml version="1.0" encoding="utf-8"?>
+<p:notes xmlns:a="http://schemas.openxmlformats.org/drawingml/2006/main" xmlns:r="http://schemas.openxmlformats.org/officeDocument/2006/relationships" xmlns:p="http://schemas.openxmlformats.org/presentationml/2006/main">
+  <p:cSld>
+    <p:spTree>
+      <p:nvGrpSpPr>
+        <p:cNvPr id="1" name=""/>
+        <p:cNvGrpSpPr/>
+        <p:nvPr/>
+      </p:nvGrpSpPr>
+      <p:grpSpPr>
+        <a:xfrm>
+          <a:off x="0" y="0"/>
+          <a:ext cx="0" cy="0"/>
+          <a:chOff x="0" y="0"/>
+          <a:chExt cx="0" cy="0"/>
+        </a:xfrm>
+      </p:grpSpPr>
+      <p:sp>
+        <p:nvSpPr>
+          <p:cNvPr id="2" name="Slide Image Placeholder 1"/>
+          <p:cNvSpPr>
+            <a:spLocks noGrp="1" noRot="1" noChangeAspect="1"/>
+          </p:cNvSpPr>
+          <p:nvPr>
+            <p:ph type="sldImg"/>
+          </p:nvPr>
+        </p:nvSpPr>
+        <p:spPr/>
+      </p:sp>
+      <p:sp>
+        <p:nvSpPr>
+          <p:cNvPr id="3" name="Notes Placeholder 2"/>
+          <p:cNvSpPr>
+            <a:spLocks noGrp="1"/>
+          </p:cNvSpPr>
+          <p:nvPr>
+            <p:ph type="body" idx="1"/>
+          </p:nvPr>
+        </p:nvSpPr>
+        <p:spPr/>
+        <p:txBody>
+          <a:bodyPr/>
+          <a:lstStyle/>
+          <a:p>
+            <a:r>
+              <a:rPr lang="en-US" dirty="0"/>
+              <a:t/>
+            </a:r>
+            <a:endParaRPr lang="en-US" dirty="0"/>
+          </a:p>
+        </p:txBody>
+      </p:sp>
+      <p:sp>
+        <p:nvSpPr>
+          <p:cNvPr id="4" name="Slide Number Placeholder 3"/>
+          <p:cNvSpPr>
+            <a:spLocks noGrp="1"/>
+          </p:cNvSpPr>
+          <p:nvPr>
+            <p:ph type="sldNum" sz="quarter" idx="10"/>
+          </p:nvPr>
+        </p:nvSpPr>
+        <p:spPr/>
+        <p:txBody>
+          <a:bodyPr/>
+          <a:lstStyle/>
+          <a:p>
+            <a:fld id="{F7021451-1387-4CA6-816F-3879F97B5CBC}" type="slidenum">
+              <a:rPr lang="en-US"/>
+              <a:t>11</a:t>
             </a:fld>
             <a:endParaRPr lang="en-US"/>
           </a:p>
@@ -1876,102 +1965,6 @@
         </p:nvSpPr>
         <p:spPr>
           <a:xfrm>
-            <a:off x="406301" y="1223963"/>
-            <a:ext cx="8498026" cy="274290"/>
-          </a:xfrm>
-          <a:prstGeom prst="rect">
-            <a:avLst/>
-          </a:prstGeom>
-          <a:noFill/>
-          <a:ln/>
-        </p:spPr>
-        <p:txBody>
-          <a:bodyPr wrap="square" lIns="0" tIns="0" rIns="0" bIns="0" rtlCol="0" anchor="t"/>
-          <a:lstStyle/>
-          <a:p>
-            <a:pPr algn="l" indent="0" marL="0">
-              <a:lnSpc>
-                <a:spcPts val="2160"/>
-              </a:lnSpc>
-              <a:spcBef>
-                <a:spcPts val="600"/>
-              </a:spcBef>
-              <a:spcAft>
-                <a:spcPts val="800"/>
-              </a:spcAft>
-              <a:buNone/>
-            </a:pPr>
-            <a:r>
-              <a:rPr lang="en-US" sz="1800" b="1" dirty="0">
-                <a:solidFill>
-                  <a:srgbClr val="997929"/>
-                </a:solidFill>
-                <a:latin typeface="Times New Roman" pitchFamily="34" charset="0"/>
-                <a:ea typeface="Times New Roman" pitchFamily="34" charset="-122"/>
-                <a:cs typeface="Times New Roman" pitchFamily="34" charset="-120"/>
-              </a:rPr>
-              <a:t>Learning objective</a:t>
-            </a:r>
-            <a:endParaRPr lang="en-US" sz="1800" dirty="0"/>
-          </a:p>
-        </p:txBody>
-      </p:sp>
-      <p:sp>
-        <p:nvSpPr>
-          <p:cNvPr id="6" name="Text 4"/>
-          <p:cNvSpPr/>
-          <p:nvPr/>
-        </p:nvSpPr>
-        <p:spPr>
-          <a:xfrm>
-            <a:off x="406301" y="1637854"/>
-            <a:ext cx="8498026" cy="213271"/>
-          </a:xfrm>
-          <a:prstGeom prst="rect">
-            <a:avLst/>
-          </a:prstGeom>
-          <a:noFill/>
-          <a:ln/>
-        </p:spPr>
-        <p:txBody>
-          <a:bodyPr wrap="square" lIns="0" tIns="0" rIns="0" bIns="0" rtlCol="0" anchor="t"/>
-          <a:lstStyle/>
-          <a:p>
-            <a:pPr algn="l" indent="0" marL="0">
-              <a:lnSpc>
-                <a:spcPts val="1680"/>
-              </a:lnSpc>
-              <a:spcBef>
-                <a:spcPts val="300"/>
-              </a:spcBef>
-              <a:spcAft>
-                <a:spcPts val="300"/>
-              </a:spcAft>
-              <a:buNone/>
-            </a:pPr>
-            <a:r>
-              <a:rPr lang="en-US" sz="1200" dirty="0">
-                <a:solidFill>
-                  <a:srgbClr val="1A1A1A"/>
-                </a:solidFill>
-                <a:latin typeface="Georgia" pitchFamily="34" charset="0"/>
-                <a:ea typeface="Georgia" pitchFamily="34" charset="-122"/>
-                <a:cs typeface="Georgia" pitchFamily="34" charset="-120"/>
-              </a:rPr>
-              <a:t>Each student chooses Math track OR History track, drafts a one-paragraph thesis, and writes a working outline.</a:t>
-            </a:r>
-            <a:endParaRPr lang="en-US" sz="1200" dirty="0"/>
-          </a:p>
-        </p:txBody>
-      </p:sp>
-      <p:sp>
-        <p:nvSpPr>
-          <p:cNvPr id="7" name="Text 5"/>
-          <p:cNvSpPr/>
-          <p:nvPr/>
-        </p:nvSpPr>
-        <p:spPr>
-          <a:xfrm>
             <a:off x="406301" y="4434929"/>
             <a:ext cx="8498026" cy="213271"/>
           </a:xfrm>
@@ -2116,7 +2109,7 @@
                 <a:ea typeface="Times New Roman" pitchFamily="34" charset="-122"/>
                 <a:cs typeface="Times New Roman" pitchFamily="34" charset="-120"/>
               </a:rPr>
-              <a:t>Teacher notes</a:t>
+              <a:t>Differentiation</a:t>
             </a:r>
             <a:endParaRPr lang="en-US" sz="1800" dirty="0"/>
           </a:p>
@@ -2130,8 +2123,8 @@
         </p:nvSpPr>
         <p:spPr>
           <a:xfrm>
-            <a:off x="406301" y="870942"/>
-            <a:ext cx="8498026" cy="426541"/>
+            <a:off x="634901" y="883593"/>
+            <a:ext cx="8102798" cy="525661"/>
           </a:xfrm>
           <a:prstGeom prst="rect">
             <a:avLst/>
@@ -2143,20 +2136,18 @@
           <a:bodyPr wrap="square" lIns="0" tIns="0" rIns="0" bIns="0" rtlCol="0" anchor="t"/>
           <a:lstStyle/>
           <a:p>
-            <a:pPr algn="l" indent="0" marL="0">
-              <a:lnSpc>
-                <a:spcPts val="1680"/>
-              </a:lnSpc>
-              <a:spcBef>
-                <a:spcPts val="300"/>
-              </a:spcBef>
-              <a:spcAft>
-                <a:spcPts val="300"/>
-              </a:spcAft>
-              <a:buNone/>
-            </a:pPr>
-            <a:r>
-              <a:rPr lang="en-US" sz="1200" dirty="0">
+            <a:pPr algn="l" marL="342900" indent="-342900">
+              <a:lnSpc>
+                <a:spcPts val="1620"/>
+              </a:lnSpc>
+              <a:spcAft>
+                <a:spcPts val="300"/>
+              </a:spcAft>
+              <a:buSzPct val="100000"/>
+              <a:buChar char="•"/>
+            </a:pPr>
+            <a:r>
+              <a:rPr lang="en-US" sz="1200" b="1" dirty="0">
                 <a:solidFill>
                   <a:srgbClr val="1A1A1A"/>
                 </a:solidFill>
@@ -2164,7 +2155,299 @@
                 <a:ea typeface="Georgia" pitchFamily="34" charset="-122"/>
                 <a:cs typeface="Georgia" pitchFamily="34" charset="-120"/>
               </a:rPr>
-              <a:t>– Math-track students need access to LaTeX or clean number-formatted writing for proofs. – History-track students need ALL three sources (Tirthaji preface, Dani, Plofker) at hand.</a:t>
+              <a:t>Tier up:</a:t>
+            </a:r>
+            <a:pPr algn="l" indent="0" marL="0">
+              <a:lnSpc>
+                <a:spcPts val="1620"/>
+              </a:lnSpc>
+              <a:spcAft>
+                <a:spcPts val="300"/>
+              </a:spcAft>
+              <a:buNone/>
+            </a:pPr>
+            <a:r>
+              <a:rPr lang="en-US" sz="1200" dirty="0">
+                <a:solidFill>
+                  <a:srgbClr val="1A1A1A"/>
+                </a:solidFill>
+                <a:latin typeface="Georgia" pitchFamily="34" charset="0"/>
+                <a:ea typeface="Georgia" pitchFamily="34" charset="-122"/>
+                <a:cs typeface="Georgia" pitchFamily="34" charset="-120"/>
+              </a:rPr>
+              <a:t> Math track — propose your own algorithm extension (e.g. to multiplication using the same dot logic).</a:t>
+            </a:r>
+            <a:endParaRPr lang="en-US" sz="1200" dirty="0"/>
+          </a:p>
+          <a:p>
+            <a:pPr algn="l" marL="342900" indent="-342900">
+              <a:lnSpc>
+                <a:spcPts val="1620"/>
+              </a:lnSpc>
+              <a:spcAft>
+                <a:spcPts val="300"/>
+              </a:spcAft>
+              <a:buSzPct val="100000"/>
+              <a:buChar char="•"/>
+            </a:pPr>
+            <a:r>
+              <a:rPr lang="en-US" sz="1200" b="1" dirty="0">
+                <a:solidFill>
+                  <a:srgbClr val="1A1A1A"/>
+                </a:solidFill>
+                <a:latin typeface="Georgia" pitchFamily="34" charset="0"/>
+                <a:ea typeface="Georgia" pitchFamily="34" charset="-122"/>
+                <a:cs typeface="Georgia" pitchFamily="34" charset="-120"/>
+              </a:rPr>
+              <a:t>Tier down:</a:t>
+            </a:r>
+            <a:pPr algn="l" indent="0" marL="0">
+              <a:lnSpc>
+                <a:spcPts val="1620"/>
+              </a:lnSpc>
+              <a:spcAft>
+                <a:spcPts val="300"/>
+              </a:spcAft>
+              <a:buNone/>
+            </a:pPr>
+            <a:r>
+              <a:rPr lang="en-US" sz="1200" dirty="0">
+                <a:solidFill>
+                  <a:srgbClr val="1A1A1A"/>
+                </a:solidFill>
+                <a:latin typeface="Georgia" pitchFamily="34" charset="0"/>
+                <a:ea typeface="Georgia" pitchFamily="34" charset="-122"/>
+                <a:cs typeface="Georgia" pitchFamily="34" charset="-120"/>
+              </a:rPr>
+              <a:t> History track — narrow to a single quote from Tirthaji and analyse it deeply.</a:t>
+            </a:r>
+            <a:endParaRPr lang="en-US" sz="1200" dirty="0"/>
+          </a:p>
+        </p:txBody>
+      </p:sp>
+      <p:sp>
+        <p:nvSpPr>
+          <p:cNvPr id="5" name="Text 3"/>
+          <p:cNvSpPr/>
+          <p:nvPr/>
+        </p:nvSpPr>
+        <p:spPr>
+          <a:xfrm>
+            <a:off x="406301" y="4434929"/>
+            <a:ext cx="8498026" cy="213271"/>
+          </a:xfrm>
+          <a:prstGeom prst="rect">
+            <a:avLst/>
+          </a:prstGeom>
+          <a:noFill/>
+          <a:ln/>
+        </p:spPr>
+        <p:txBody>
+          <a:bodyPr wrap="square" lIns="0" tIns="0" rIns="0" bIns="0" rtlCol="0" anchor="t"/>
+          <a:lstStyle/>
+          <a:p>
+            <a:pPr algn="l" indent="0" marL="0">
+              <a:lnSpc>
+                <a:spcPts val="1680"/>
+              </a:lnSpc>
+              <a:spcBef>
+                <a:spcPts val="300"/>
+              </a:spcBef>
+              <a:spcAft>
+                <a:spcPts val="300"/>
+              </a:spcAft>
+              <a:buNone/>
+            </a:pPr>
+            <a:r>
+              <a:rPr lang="en-US" sz="1200" dirty="0">
+                <a:solidFill>
+                  <a:srgbClr val="1A1A1A"/>
+                </a:solidFill>
+                <a:latin typeface="Georgia" pitchFamily="34" charset="0"/>
+                <a:ea typeface="Georgia" pitchFamily="34" charset="-122"/>
+                <a:cs typeface="Georgia" pitchFamily="34" charset="-120"/>
+              </a:rPr>
+              <a:t>Senior ·  · IKS Curriculum</a:t>
+            </a:r>
+            <a:endParaRPr lang="en-US" sz="1200" dirty="0"/>
+          </a:p>
+        </p:txBody>
+      </p:sp>
+    </p:spTree>
+  </p:cSld>
+  <p:clrMapOvr>
+    <a:masterClrMapping/>
+  </p:clrMapOvr>
+</p:sld>
+</file>
+
+<file path=ppt/slides/slide11.xml><?xml version="1.0" encoding="utf-8"?>
+<p:sld xmlns:a="http://schemas.openxmlformats.org/drawingml/2006/main" xmlns:r="http://schemas.openxmlformats.org/officeDocument/2006/relationships" xmlns:p="http://schemas.openxmlformats.org/presentationml/2006/main">
+  <p:cSld name="Slide 11">
+    <p:bg>
+      <p:bgPr>
+        <a:solidFill>
+          <a:srgbClr val="FAF7F2"/>
+        </a:solidFill>
+      </p:bgPr>
+    </p:bg>
+    <p:spTree>
+      <p:nvGrpSpPr>
+        <p:cNvPr id="1" name=""/>
+        <p:cNvGrpSpPr/>
+        <p:nvPr/>
+      </p:nvGrpSpPr>
+      <p:grpSpPr>
+        <a:xfrm>
+          <a:off x="0" y="0"/>
+          <a:ext cx="0" cy="0"/>
+          <a:chOff x="0" y="0"/>
+          <a:chExt cx="0" cy="0"/>
+        </a:xfrm>
+      </p:grpSpPr>
+      <p:sp>
+        <p:nvSpPr>
+          <p:cNvPr id="2" name="Text 0"/>
+          <p:cNvSpPr/>
+          <p:nvPr/>
+        </p:nvSpPr>
+        <p:spPr>
+          <a:xfrm>
+            <a:off x="0" y="0"/>
+            <a:ext cx="9144000" cy="101501"/>
+          </a:xfrm>
+          <a:prstGeom prst="rect">
+            <a:avLst/>
+          </a:prstGeom>
+          <a:solidFill>
+            <a:srgbClr val="5D1D2E"/>
+          </a:solidFill>
+          <a:ln/>
+        </p:spPr>
+        <p:txBody>
+          <a:bodyPr wrap="square" rtlCol="0" anchor="ctr"/>
+          <a:lstStyle/>
+          <a:p>
+            <a:pPr indent="0" marL="0">
+              <a:buNone/>
+            </a:pPr>
+            <a:endParaRPr lang="en-US" dirty="0"/>
+          </a:p>
+        </p:txBody>
+      </p:sp>
+      <p:sp>
+        <p:nvSpPr>
+          <p:cNvPr id="3" name="Text 1"/>
+          <p:cNvSpPr/>
+          <p:nvPr/>
+        </p:nvSpPr>
+        <p:spPr>
+          <a:xfrm>
+            <a:off x="406301" y="457051"/>
+            <a:ext cx="8498026" cy="274290"/>
+          </a:xfrm>
+          <a:prstGeom prst="rect">
+            <a:avLst/>
+          </a:prstGeom>
+          <a:noFill/>
+          <a:ln/>
+        </p:spPr>
+        <p:txBody>
+          <a:bodyPr wrap="square" lIns="0" tIns="0" rIns="0" bIns="0" rtlCol="0" anchor="t"/>
+          <a:lstStyle/>
+          <a:p>
+            <a:pPr algn="l" indent="0" marL="0">
+              <a:lnSpc>
+                <a:spcPts val="2160"/>
+              </a:lnSpc>
+              <a:spcBef>
+                <a:spcPts val="600"/>
+              </a:spcBef>
+              <a:spcAft>
+                <a:spcPts val="800"/>
+              </a:spcAft>
+              <a:buNone/>
+            </a:pPr>
+            <a:r>
+              <a:rPr lang="en-US" sz="1800" b="1" dirty="0">
+                <a:solidFill>
+                  <a:srgbClr val="997929"/>
+                </a:solidFill>
+                <a:latin typeface="Times New Roman" pitchFamily="34" charset="0"/>
+                <a:ea typeface="Times New Roman" pitchFamily="34" charset="-122"/>
+                <a:cs typeface="Times New Roman" pitchFamily="34" charset="-120"/>
+              </a:rPr>
+              <a:t>Teacher notes</a:t>
+            </a:r>
+            <a:endParaRPr lang="en-US" sz="1800" dirty="0"/>
+          </a:p>
+        </p:txBody>
+      </p:sp>
+      <p:sp>
+        <p:nvSpPr>
+          <p:cNvPr id="4" name="Text 2"/>
+          <p:cNvSpPr/>
+          <p:nvPr/>
+        </p:nvSpPr>
+        <p:spPr>
+          <a:xfrm>
+            <a:off x="634901" y="883593"/>
+            <a:ext cx="8102798" cy="525661"/>
+          </a:xfrm>
+          <a:prstGeom prst="rect">
+            <a:avLst/>
+          </a:prstGeom>
+          <a:noFill/>
+          <a:ln/>
+        </p:spPr>
+        <p:txBody>
+          <a:bodyPr wrap="square" lIns="0" tIns="0" rIns="0" bIns="0" rtlCol="0" anchor="t"/>
+          <a:lstStyle/>
+          <a:p>
+            <a:pPr algn="l" marL="342900" indent="-342900">
+              <a:lnSpc>
+                <a:spcPts val="1620"/>
+              </a:lnSpc>
+              <a:spcAft>
+                <a:spcPts val="300"/>
+              </a:spcAft>
+              <a:buSzPct val="100000"/>
+              <a:buChar char="•"/>
+            </a:pPr>
+            <a:r>
+              <a:rPr lang="en-US" sz="1200" dirty="0">
+                <a:solidFill>
+                  <a:srgbClr val="1A1A1A"/>
+                </a:solidFill>
+                <a:latin typeface="Georgia" pitchFamily="34" charset="0"/>
+                <a:ea typeface="Georgia" pitchFamily="34" charset="-122"/>
+                <a:cs typeface="Georgia" pitchFamily="34" charset="-120"/>
+              </a:rPr>
+              <a:t>Math-track students need access to LaTeX or clean number-formatted writing for proofs.</a:t>
+            </a:r>
+            <a:endParaRPr lang="en-US" sz="1200" dirty="0"/>
+          </a:p>
+          <a:p>
+            <a:pPr algn="l" marL="342900" indent="-342900">
+              <a:lnSpc>
+                <a:spcPts val="1620"/>
+              </a:lnSpc>
+              <a:spcAft>
+                <a:spcPts val="300"/>
+              </a:spcAft>
+              <a:buSzPct val="100000"/>
+              <a:buChar char="•"/>
+            </a:pPr>
+            <a:r>
+              <a:rPr lang="en-US" sz="1200" dirty="0">
+                <a:solidFill>
+                  <a:srgbClr val="1A1A1A"/>
+                </a:solidFill>
+                <a:latin typeface="Georgia" pitchFamily="34" charset="0"/>
+                <a:ea typeface="Georgia" pitchFamily="34" charset="-122"/>
+                <a:cs typeface="Georgia" pitchFamily="34" charset="-120"/>
+              </a:rPr>
+              <a:t>History-track students need ALL three sources (Tirthaji preface, Dani, Plofker) at hand.</a:t>
             </a:r>
             <a:endParaRPr lang="en-US" sz="1200" dirty="0"/>
           </a:p>
@@ -2322,7 +2605,7 @@
                 <a:ea typeface="Times New Roman" pitchFamily="34" charset="-122"/>
                 <a:cs typeface="Times New Roman" pitchFamily="34" charset="-120"/>
               </a:rPr>
-              <a:t>Materials</a:t>
+              <a:t>Learning objective</a:t>
             </a:r>
             <a:endParaRPr lang="en-US" sz="1800" dirty="0"/>
           </a:p>
@@ -2370,7 +2653,7 @@
                 <a:ea typeface="Georgia" pitchFamily="34" charset="-122"/>
                 <a:cs typeface="Georgia" pitchFamily="34" charset="-120"/>
               </a:rPr>
-              <a:t>– Project brief – Rubric – Drafting materials</a:t>
+              <a:t>Each student chooses Math track OR History track, drafts a one-paragraph thesis, and writes a working outline.</a:t>
             </a:r>
             <a:endParaRPr lang="en-US" sz="1200" dirty="0"/>
           </a:p>
@@ -2528,7 +2811,7 @@
                 <a:ea typeface="Times New Roman" pitchFamily="34" charset="-122"/>
                 <a:cs typeface="Times New Roman" pitchFamily="34" charset="-120"/>
               </a:rPr>
-              <a:t>Flow</a:t>
+              <a:t>Materials</a:t>
             </a:r>
             <a:endParaRPr lang="en-US" sz="1800" dirty="0"/>
           </a:p>
@@ -2537,6 +2820,100 @@
       <p:sp>
         <p:nvSpPr>
           <p:cNvPr id="4" name="Text 2"/>
+          <p:cNvSpPr/>
+          <p:nvPr/>
+        </p:nvSpPr>
+        <p:spPr>
+          <a:xfrm>
+            <a:off x="634901" y="883593"/>
+            <a:ext cx="8102798" cy="769441"/>
+          </a:xfrm>
+          <a:prstGeom prst="rect">
+            <a:avLst/>
+          </a:prstGeom>
+          <a:noFill/>
+          <a:ln/>
+        </p:spPr>
+        <p:txBody>
+          <a:bodyPr wrap="square" lIns="0" tIns="0" rIns="0" bIns="0" rtlCol="0" anchor="t"/>
+          <a:lstStyle/>
+          <a:p>
+            <a:pPr algn="l" marL="342900" indent="-342900">
+              <a:lnSpc>
+                <a:spcPts val="1620"/>
+              </a:lnSpc>
+              <a:spcAft>
+                <a:spcPts val="300"/>
+              </a:spcAft>
+              <a:buSzPct val="100000"/>
+              <a:buChar char="•"/>
+            </a:pPr>
+            <a:r>
+              <a:rPr lang="en-US" sz="1200" dirty="0">
+                <a:solidFill>
+                  <a:srgbClr val="1A1A1A"/>
+                </a:solidFill>
+                <a:latin typeface="Georgia" pitchFamily="34" charset="0"/>
+                <a:ea typeface="Georgia" pitchFamily="34" charset="-122"/>
+                <a:cs typeface="Georgia" pitchFamily="34" charset="-120"/>
+              </a:rPr>
+              <a:t>Project brief</a:t>
+            </a:r>
+            <a:endParaRPr lang="en-US" sz="1200" dirty="0"/>
+          </a:p>
+          <a:p>
+            <a:pPr algn="l" marL="342900" indent="-342900">
+              <a:lnSpc>
+                <a:spcPts val="1620"/>
+              </a:lnSpc>
+              <a:spcAft>
+                <a:spcPts val="300"/>
+              </a:spcAft>
+              <a:buSzPct val="100000"/>
+              <a:buChar char="•"/>
+            </a:pPr>
+            <a:r>
+              <a:rPr lang="en-US" sz="1200" dirty="0">
+                <a:solidFill>
+                  <a:srgbClr val="1A1A1A"/>
+                </a:solidFill>
+                <a:latin typeface="Georgia" pitchFamily="34" charset="0"/>
+                <a:ea typeface="Georgia" pitchFamily="34" charset="-122"/>
+                <a:cs typeface="Georgia" pitchFamily="34" charset="-120"/>
+              </a:rPr>
+              <a:t>Rubric</a:t>
+            </a:r>
+            <a:endParaRPr lang="en-US" sz="1200" dirty="0"/>
+          </a:p>
+          <a:p>
+            <a:pPr algn="l" marL="342900" indent="-342900">
+              <a:lnSpc>
+                <a:spcPts val="1620"/>
+              </a:lnSpc>
+              <a:spcAft>
+                <a:spcPts val="300"/>
+              </a:spcAft>
+              <a:buSzPct val="100000"/>
+              <a:buChar char="•"/>
+            </a:pPr>
+            <a:r>
+              <a:rPr lang="en-US" sz="1200" dirty="0">
+                <a:solidFill>
+                  <a:srgbClr val="1A1A1A"/>
+                </a:solidFill>
+                <a:latin typeface="Georgia" pitchFamily="34" charset="0"/>
+                <a:ea typeface="Georgia" pitchFamily="34" charset="-122"/>
+                <a:cs typeface="Georgia" pitchFamily="34" charset="-120"/>
+              </a:rPr>
+              <a:t>Drafting materials</a:t>
+            </a:r>
+            <a:endParaRPr lang="en-US" sz="1200" dirty="0"/>
+          </a:p>
+        </p:txBody>
+      </p:sp>
+      <p:sp>
+        <p:nvSpPr>
+          <p:cNvPr id="5" name="Text 3"/>
           <p:cNvSpPr/>
           <p:nvPr/>
         </p:nvSpPr>
@@ -2686,7 +3063,7 @@
                 <a:ea typeface="Times New Roman" pitchFamily="34" charset="-122"/>
                 <a:cs typeface="Times New Roman" pitchFamily="34" charset="-120"/>
               </a:rPr>
-              <a:t>Warm-up (5 min)</a:t>
+              <a:t>Flow</a:t>
             </a:r>
             <a:endParaRPr lang="en-US" sz="1800" dirty="0"/>
           </a:p>
@@ -2695,54 +3072,6 @@
       <p:sp>
         <p:nvSpPr>
           <p:cNvPr id="4" name="Text 2"/>
-          <p:cNvSpPr/>
-          <p:nvPr/>
-        </p:nvSpPr>
-        <p:spPr>
-          <a:xfrm>
-            <a:off x="406301" y="870942"/>
-            <a:ext cx="8498026" cy="213271"/>
-          </a:xfrm>
-          <a:prstGeom prst="rect">
-            <a:avLst/>
-          </a:prstGeom>
-          <a:noFill/>
-          <a:ln/>
-        </p:spPr>
-        <p:txBody>
-          <a:bodyPr wrap="square" lIns="0" tIns="0" rIns="0" bIns="0" rtlCol="0" anchor="t"/>
-          <a:lstStyle/>
-          <a:p>
-            <a:pPr algn="l" indent="0" marL="0">
-              <a:lnSpc>
-                <a:spcPts val="1680"/>
-              </a:lnSpc>
-              <a:spcBef>
-                <a:spcPts val="300"/>
-              </a:spcBef>
-              <a:spcAft>
-                <a:spcPts val="300"/>
-              </a:spcAft>
-              <a:buNone/>
-            </a:pPr>
-            <a:r>
-              <a:rPr lang="en-US" sz="1200" dirty="0">
-                <a:solidFill>
-                  <a:srgbClr val="1A1A1A"/>
-                </a:solidFill>
-                <a:latin typeface="Georgia" pitchFamily="34" charset="0"/>
-                <a:ea typeface="Georgia" pitchFamily="34" charset="-122"/>
-                <a:cs typeface="Georgia" pitchFamily="34" charset="-120"/>
-              </a:rPr>
-              <a:t>– Hand out rubric. Note: tracks have different rubric weighting (see project brief).</a:t>
-            </a:r>
-            <a:endParaRPr lang="en-US" sz="1200" dirty="0"/>
-          </a:p>
-        </p:txBody>
-      </p:sp>
-      <p:sp>
-        <p:nvSpPr>
-          <p:cNvPr id="5" name="Text 3"/>
           <p:cNvSpPr/>
           <p:nvPr/>
         </p:nvSpPr>
@@ -2892,7 +3221,7 @@
                 <a:ea typeface="Times New Roman" pitchFamily="34" charset="-122"/>
                 <a:cs typeface="Times New Roman" pitchFamily="34" charset="-120"/>
               </a:rPr>
-              <a:t>Track choice + planning (15 min)</a:t>
+              <a:t>Warm-up (5 min)</a:t>
             </a:r>
             <a:endParaRPr lang="en-US" sz="1800" dirty="0"/>
           </a:p>
@@ -2906,8 +3235,8 @@
         </p:nvSpPr>
         <p:spPr>
           <a:xfrm>
-            <a:off x="406301" y="870942"/>
-            <a:ext cx="8498026" cy="639812"/>
+            <a:off x="634901" y="883593"/>
+            <a:ext cx="8102798" cy="281880"/>
           </a:xfrm>
           <a:prstGeom prst="rect">
             <a:avLst/>
@@ -2919,17 +3248,15 @@
           <a:bodyPr wrap="square" lIns="0" tIns="0" rIns="0" bIns="0" rtlCol="0" anchor="t"/>
           <a:lstStyle/>
           <a:p>
-            <a:pPr algn="l" indent="0" marL="0">
-              <a:lnSpc>
-                <a:spcPts val="1680"/>
-              </a:lnSpc>
-              <a:spcBef>
-                <a:spcPts val="300"/>
-              </a:spcBef>
-              <a:spcAft>
-                <a:spcPts val="300"/>
-              </a:spcAft>
-              <a:buNone/>
+            <a:pPr algn="l" marL="342900" indent="-342900">
+              <a:lnSpc>
+                <a:spcPts val="1620"/>
+              </a:lnSpc>
+              <a:spcAft>
+                <a:spcPts val="300"/>
+              </a:spcAft>
+              <a:buSzPct val="100000"/>
+              <a:buChar char="•"/>
             </a:pPr>
             <a:r>
               <a:rPr lang="en-US" sz="1200" dirty="0">
@@ -2940,145 +3267,7 @@
                 <a:ea typeface="Georgia" pitchFamily="34" charset="-122"/>
                 <a:cs typeface="Georgia" pitchFamily="34" charset="-120"/>
               </a:rPr>
-              <a:t>– Each student commits to a track: - </a:t>
-            </a:r>
-            <a:pPr algn="l" indent="0" marL="0">
-              <a:lnSpc>
-                <a:spcPts val="1680"/>
-              </a:lnSpc>
-              <a:spcBef>
-                <a:spcPts val="300"/>
-              </a:spcBef>
-              <a:spcAft>
-                <a:spcPts val="300"/>
-              </a:spcAft>
-              <a:buNone/>
-            </a:pPr>
-            <a:r>
-              <a:rPr lang="en-US" sz="1200" b="1" dirty="0">
-                <a:solidFill>
-                  <a:srgbClr val="1A1A1A"/>
-                </a:solidFill>
-                <a:latin typeface="Georgia" pitchFamily="34" charset="0"/>
-                <a:ea typeface="Georgia" pitchFamily="34" charset="-122"/>
-                <a:cs typeface="Georgia" pitchFamily="34" charset="-120"/>
-              </a:rPr>
-              <a:t>Math track:</a:t>
-            </a:r>
-            <a:pPr algn="l" indent="0" marL="0">
-              <a:lnSpc>
-                <a:spcPts val="1680"/>
-              </a:lnSpc>
-              <a:spcBef>
-                <a:spcPts val="300"/>
-              </a:spcBef>
-              <a:spcAft>
-                <a:spcPts val="300"/>
-              </a:spcAft>
-              <a:buNone/>
-            </a:pPr>
-            <a:r>
-              <a:rPr lang="en-US" sz="1200" dirty="0">
-                <a:solidFill>
-                  <a:srgbClr val="1A1A1A"/>
-                </a:solidFill>
-                <a:latin typeface="Georgia" pitchFamily="34" charset="0"/>
-                <a:ea typeface="Georgia" pitchFamily="34" charset="-122"/>
-                <a:cs typeface="Georgia" pitchFamily="34" charset="-120"/>
-              </a:rPr>
-              <a:t> Generalise the dot method to base-</a:t>
-            </a:r>
-            <a:pPr algn="l" indent="0" marL="0">
-              <a:lnSpc>
-                <a:spcPts val="1680"/>
-              </a:lnSpc>
-              <a:spcBef>
-                <a:spcPts val="300"/>
-              </a:spcBef>
-              <a:spcAft>
-                <a:spcPts val="300"/>
-              </a:spcAft>
-              <a:buNone/>
-            </a:pPr>
-            <a:r>
-              <a:rPr lang="en-US" sz="1200" i="1" dirty="0">
-                <a:solidFill>
-                  <a:srgbClr val="1A1A1A"/>
-                </a:solidFill>
-                <a:latin typeface="Georgia" pitchFamily="34" charset="0"/>
-                <a:ea typeface="Georgia" pitchFamily="34" charset="-122"/>
-                <a:cs typeface="Georgia" pitchFamily="34" charset="-120"/>
-              </a:rPr>
-              <a:t>n</a:t>
-            </a:r>
-            <a:pPr algn="l" indent="0" marL="0">
-              <a:lnSpc>
-                <a:spcPts val="1680"/>
-              </a:lnSpc>
-              <a:spcBef>
-                <a:spcPts val="300"/>
-              </a:spcBef>
-              <a:spcAft>
-                <a:spcPts val="300"/>
-              </a:spcAft>
-              <a:buNone/>
-            </a:pPr>
-            <a:r>
-              <a:rPr lang="en-US" sz="1200" dirty="0">
-                <a:solidFill>
-                  <a:srgbClr val="1A1A1A"/>
-                </a:solidFill>
-                <a:latin typeface="Georgia" pitchFamily="34" charset="0"/>
-                <a:ea typeface="Georgia" pitchFamily="34" charset="-122"/>
-                <a:cs typeface="Georgia" pitchFamily="34" charset="-120"/>
-              </a:rPr>
-              <a:t> and prove correctness. Optional extension: compare complexity with standard algorithm. - </a:t>
-            </a:r>
-            <a:pPr algn="l" indent="0" marL="0">
-              <a:lnSpc>
-                <a:spcPts val="1680"/>
-              </a:lnSpc>
-              <a:spcBef>
-                <a:spcPts val="300"/>
-              </a:spcBef>
-              <a:spcAft>
-                <a:spcPts val="300"/>
-              </a:spcAft>
-              <a:buNone/>
-            </a:pPr>
-            <a:r>
-              <a:rPr lang="en-US" sz="1200" b="1" dirty="0">
-                <a:solidFill>
-                  <a:srgbClr val="1A1A1A"/>
-                </a:solidFill>
-                <a:latin typeface="Georgia" pitchFamily="34" charset="0"/>
-                <a:ea typeface="Georgia" pitchFamily="34" charset="-122"/>
-                <a:cs typeface="Georgia" pitchFamily="34" charset="-120"/>
-              </a:rPr>
-              <a:t>History track:</a:t>
-            </a:r>
-            <a:pPr algn="l" indent="0" marL="0">
-              <a:lnSpc>
-                <a:spcPts val="1680"/>
-              </a:lnSpc>
-              <a:spcBef>
-                <a:spcPts val="300"/>
-              </a:spcBef>
-              <a:spcAft>
-                <a:spcPts val="300"/>
-              </a:spcAft>
-              <a:buNone/>
-            </a:pPr>
-            <a:r>
-              <a:rPr lang="en-US" sz="1200" dirty="0">
-                <a:solidFill>
-                  <a:srgbClr val="1A1A1A"/>
-                </a:solidFill>
-                <a:latin typeface="Georgia" pitchFamily="34" charset="0"/>
-                <a:ea typeface="Georgia" pitchFamily="34" charset="-122"/>
-                <a:cs typeface="Georgia" pitchFamily="34" charset="-120"/>
-              </a:rPr>
-              <a:t> Argue a position on the labelling / provenance of "Vedic mathematics."</a:t>
+              <a:t>Hand out rubric. Note: tracks have different rubric weighting (see project brief).</a:t>
             </a:r>
             <a:endParaRPr lang="en-US" sz="1200" dirty="0"/>
           </a:p>
@@ -3087,54 +3276,6 @@
       <p:sp>
         <p:nvSpPr>
           <p:cNvPr id="5" name="Text 3"/>
-          <p:cNvSpPr/>
-          <p:nvPr/>
-        </p:nvSpPr>
-        <p:spPr>
-          <a:xfrm>
-            <a:off x="406301" y="1586954"/>
-            <a:ext cx="8498026" cy="213271"/>
-          </a:xfrm>
-          <a:prstGeom prst="rect">
-            <a:avLst/>
-          </a:prstGeom>
-          <a:noFill/>
-          <a:ln/>
-        </p:spPr>
-        <p:txBody>
-          <a:bodyPr wrap="square" lIns="0" tIns="0" rIns="0" bIns="0" rtlCol="0" anchor="t"/>
-          <a:lstStyle/>
-          <a:p>
-            <a:pPr algn="l" indent="0" marL="0">
-              <a:lnSpc>
-                <a:spcPts val="1680"/>
-              </a:lnSpc>
-              <a:spcBef>
-                <a:spcPts val="300"/>
-              </a:spcBef>
-              <a:spcAft>
-                <a:spcPts val="300"/>
-              </a:spcAft>
-              <a:buNone/>
-            </a:pPr>
-            <a:r>
-              <a:rPr lang="en-US" sz="1200" dirty="0">
-                <a:solidFill>
-                  <a:srgbClr val="1A1A1A"/>
-                </a:solidFill>
-                <a:latin typeface="Georgia" pitchFamily="34" charset="0"/>
-                <a:ea typeface="Georgia" pitchFamily="34" charset="-122"/>
-                <a:cs typeface="Georgia" pitchFamily="34" charset="-120"/>
-              </a:rPr>
-              <a:t>– Write down: working title + thesis paragraph + 3 sources (must include 1 from Tirthaji, 1 from Dani, 1 from another).</a:t>
-            </a:r>
-            <a:endParaRPr lang="en-US" sz="1200" dirty="0"/>
-          </a:p>
-        </p:txBody>
-      </p:sp>
-      <p:sp>
-        <p:nvSpPr>
-          <p:cNvPr id="6" name="Text 4"/>
           <p:cNvSpPr/>
           <p:nvPr/>
         </p:nvSpPr>
@@ -3284,7 +3425,7 @@
                 <a:ea typeface="Times New Roman" pitchFamily="34" charset="-122"/>
                 <a:cs typeface="Times New Roman" pitchFamily="34" charset="-120"/>
               </a:rPr>
-              <a:t>Outline drafting (15 min)</a:t>
+              <a:t>Track choice + planning (15 min)</a:t>
             </a:r>
             <a:endParaRPr lang="en-US" sz="1800" dirty="0"/>
           </a:p>
@@ -3298,8 +3439,8 @@
         </p:nvSpPr>
         <p:spPr>
           <a:xfrm>
-            <a:off x="406301" y="870942"/>
-            <a:ext cx="8498026" cy="426541"/>
+            <a:off x="634901" y="883593"/>
+            <a:ext cx="8102798" cy="975122"/>
           </a:xfrm>
           <a:prstGeom prst="rect">
             <a:avLst/>
@@ -3311,17 +3452,15 @@
           <a:bodyPr wrap="square" lIns="0" tIns="0" rIns="0" bIns="0" rtlCol="0" anchor="t"/>
           <a:lstStyle/>
           <a:p>
-            <a:pPr algn="l" indent="0" marL="0">
-              <a:lnSpc>
-                <a:spcPts val="1680"/>
-              </a:lnSpc>
-              <a:spcBef>
-                <a:spcPts val="300"/>
-              </a:spcBef>
-              <a:spcAft>
-                <a:spcPts val="300"/>
-              </a:spcAft>
-              <a:buNone/>
+            <a:pPr algn="l" marL="342900" indent="-342900">
+              <a:lnSpc>
+                <a:spcPts val="1620"/>
+              </a:lnSpc>
+              <a:spcAft>
+                <a:spcPts val="300"/>
+              </a:spcAft>
+              <a:buSzPct val="100000"/>
+              <a:buChar char="•"/>
             </a:pPr>
             <a:r>
               <a:rPr lang="en-US" sz="1200" dirty="0">
@@ -3332,15 +3471,189 @@
                 <a:ea typeface="Georgia" pitchFamily="34" charset="-122"/>
                 <a:cs typeface="Georgia" pitchFamily="34" charset="-120"/>
               </a:rPr>
-              <a:t>Standard 5-6 page paper outline: – Introduction with thesis – Section 1 – Section 2 – Section 3 – Counter-argument + response – Conclusion</a:t>
+              <a:t>Each student commits to a track:</a:t>
             </a:r>
             <a:endParaRPr lang="en-US" sz="1200" dirty="0"/>
           </a:p>
+          <a:p>
+            <a:pPr algn="l" marL="342900" indent="-342900">
+              <a:lnSpc>
+                <a:spcPts val="1620"/>
+              </a:lnSpc>
+              <a:spcAft>
+                <a:spcPts val="300"/>
+              </a:spcAft>
+              <a:buSzPct val="100000"/>
+              <a:buChar char="•"/>
+            </a:pPr>
+            <a:r>
+              <a:rPr lang="en-US" sz="1200" b="1" dirty="0">
+                <a:solidFill>
+                  <a:srgbClr val="1A1A1A"/>
+                </a:solidFill>
+                <a:latin typeface="Georgia" pitchFamily="34" charset="0"/>
+                <a:ea typeface="Georgia" pitchFamily="34" charset="-122"/>
+                <a:cs typeface="Georgia" pitchFamily="34" charset="-120"/>
+              </a:rPr>
+              <a:t>Math track:</a:t>
+            </a:r>
+            <a:pPr algn="l" indent="0" marL="0">
+              <a:lnSpc>
+                <a:spcPts val="1620"/>
+              </a:lnSpc>
+              <a:spcAft>
+                <a:spcPts val="300"/>
+              </a:spcAft>
+              <a:buNone/>
+            </a:pPr>
+            <a:r>
+              <a:rPr lang="en-US" sz="1200" dirty="0">
+                <a:solidFill>
+                  <a:srgbClr val="1A1A1A"/>
+                </a:solidFill>
+                <a:latin typeface="Georgia" pitchFamily="34" charset="0"/>
+                <a:ea typeface="Georgia" pitchFamily="34" charset="-122"/>
+                <a:cs typeface="Georgia" pitchFamily="34" charset="-120"/>
+              </a:rPr>
+              <a:t> Generalise the dot method to base-</a:t>
+            </a:r>
+            <a:pPr algn="l" indent="0" marL="0">
+              <a:lnSpc>
+                <a:spcPts val="1620"/>
+              </a:lnSpc>
+              <a:spcAft>
+                <a:spcPts val="300"/>
+              </a:spcAft>
+              <a:buNone/>
+            </a:pPr>
+            <a:r>
+              <a:rPr lang="en-US" sz="1200" i="1" dirty="0">
+                <a:solidFill>
+                  <a:srgbClr val="1A1A1A"/>
+                </a:solidFill>
+                <a:latin typeface="Georgia" pitchFamily="34" charset="0"/>
+                <a:ea typeface="Georgia" pitchFamily="34" charset="-122"/>
+                <a:cs typeface="Georgia" pitchFamily="34" charset="-120"/>
+              </a:rPr>
+              <a:t>n</a:t>
+            </a:r>
+            <a:pPr algn="l" indent="0" marL="0">
+              <a:lnSpc>
+                <a:spcPts val="1620"/>
+              </a:lnSpc>
+              <a:spcAft>
+                <a:spcPts val="300"/>
+              </a:spcAft>
+              <a:buNone/>
+            </a:pPr>
+            <a:r>
+              <a:rPr lang="en-US" sz="1200" dirty="0">
+                <a:solidFill>
+                  <a:srgbClr val="1A1A1A"/>
+                </a:solidFill>
+                <a:latin typeface="Georgia" pitchFamily="34" charset="0"/>
+                <a:ea typeface="Georgia" pitchFamily="34" charset="-122"/>
+                <a:cs typeface="Georgia" pitchFamily="34" charset="-120"/>
+              </a:rPr>
+              <a:t> and prove correctness. Optional extension: compare complexity with standard algorithm.</a:t>
+            </a:r>
+            <a:endParaRPr lang="en-US" sz="1200" dirty="0"/>
+          </a:p>
+          <a:p>
+            <a:pPr algn="l" marL="342900" indent="-342900">
+              <a:lnSpc>
+                <a:spcPts val="1620"/>
+              </a:lnSpc>
+              <a:spcAft>
+                <a:spcPts val="300"/>
+              </a:spcAft>
+              <a:buSzPct val="100000"/>
+              <a:buChar char="•"/>
+            </a:pPr>
+            <a:r>
+              <a:rPr lang="en-US" sz="1200" b="1" dirty="0">
+                <a:solidFill>
+                  <a:srgbClr val="1A1A1A"/>
+                </a:solidFill>
+                <a:latin typeface="Georgia" pitchFamily="34" charset="0"/>
+                <a:ea typeface="Georgia" pitchFamily="34" charset="-122"/>
+                <a:cs typeface="Georgia" pitchFamily="34" charset="-120"/>
+              </a:rPr>
+              <a:t>History track:</a:t>
+            </a:r>
+            <a:pPr algn="l" indent="0" marL="0">
+              <a:lnSpc>
+                <a:spcPts val="1620"/>
+              </a:lnSpc>
+              <a:spcAft>
+                <a:spcPts val="300"/>
+              </a:spcAft>
+              <a:buNone/>
+            </a:pPr>
+            <a:r>
+              <a:rPr lang="en-US" sz="1200" dirty="0">
+                <a:solidFill>
+                  <a:srgbClr val="1A1A1A"/>
+                </a:solidFill>
+                <a:latin typeface="Georgia" pitchFamily="34" charset="0"/>
+                <a:ea typeface="Georgia" pitchFamily="34" charset="-122"/>
+                <a:cs typeface="Georgia" pitchFamily="34" charset="-120"/>
+              </a:rPr>
+              <a:t> Argue a position on the labelling / provenance of "Vedic mathematics."</a:t>
+            </a:r>
+            <a:endParaRPr lang="en-US" sz="1200" dirty="0"/>
+          </a:p>
         </p:txBody>
       </p:sp>
       <p:sp>
         <p:nvSpPr>
           <p:cNvPr id="5" name="Text 3"/>
+          <p:cNvSpPr/>
+          <p:nvPr/>
+        </p:nvSpPr>
+        <p:spPr>
+          <a:xfrm>
+            <a:off x="634901" y="1960215"/>
+            <a:ext cx="8102798" cy="281880"/>
+          </a:xfrm>
+          <a:prstGeom prst="rect">
+            <a:avLst/>
+          </a:prstGeom>
+          <a:noFill/>
+          <a:ln/>
+        </p:spPr>
+        <p:txBody>
+          <a:bodyPr wrap="square" lIns="0" tIns="0" rIns="0" bIns="0" rtlCol="0" anchor="t"/>
+          <a:lstStyle/>
+          <a:p>
+            <a:pPr algn="l" marL="342900" indent="-342900">
+              <a:lnSpc>
+                <a:spcPts val="1620"/>
+              </a:lnSpc>
+              <a:spcAft>
+                <a:spcPts val="300"/>
+              </a:spcAft>
+              <a:buSzPct val="100000"/>
+              <a:buChar char="•"/>
+            </a:pPr>
+            <a:r>
+              <a:rPr lang="en-US" sz="1200" dirty="0">
+                <a:solidFill>
+                  <a:srgbClr val="1A1A1A"/>
+                </a:solidFill>
+                <a:latin typeface="Georgia" pitchFamily="34" charset="0"/>
+                <a:ea typeface="Georgia" pitchFamily="34" charset="-122"/>
+                <a:cs typeface="Georgia" pitchFamily="34" charset="-120"/>
+              </a:rPr>
+              <a:t>Write down: working title + thesis paragraph + 3 sources (must include 1 from Tirthaji, 1 from Dani, 1 from another).</a:t>
+            </a:r>
+            <a:endParaRPr lang="en-US" sz="1200" dirty="0"/>
+          </a:p>
+        </p:txBody>
+      </p:sp>
+      <p:sp>
+        <p:nvSpPr>
+          <p:cNvPr id="6" name="Text 4"/>
           <p:cNvSpPr/>
           <p:nvPr/>
         </p:nvSpPr>
@@ -3490,7 +3803,7 @@
                 <a:ea typeface="Times New Roman" pitchFamily="34" charset="-122"/>
                 <a:cs typeface="Times New Roman" pitchFamily="34" charset="-120"/>
               </a:rPr>
-              <a:t>Begin drafting (10 min)</a:t>
+              <a:t>Outline drafting (15 min)</a:t>
             </a:r>
             <a:endParaRPr lang="en-US" sz="1800" dirty="0"/>
           </a:p>
@@ -3538,7 +3851,7 @@
                 <a:ea typeface="Georgia" pitchFamily="34" charset="-122"/>
                 <a:cs typeface="Georgia" pitchFamily="34" charset="-120"/>
               </a:rPr>
-              <a:t>Start the introduction. Don't worry about perfection.</a:t>
+              <a:t>Standard 5-6 page paper outline:</a:t>
             </a:r>
             <a:endParaRPr lang="en-US" sz="1200" dirty="0"/>
           </a:p>
@@ -3547,6 +3860,172 @@
       <p:sp>
         <p:nvSpPr>
           <p:cNvPr id="5" name="Text 3"/>
+          <p:cNvSpPr/>
+          <p:nvPr/>
+        </p:nvSpPr>
+        <p:spPr>
+          <a:xfrm>
+            <a:off x="634901" y="1173063"/>
+            <a:ext cx="8102798" cy="1500783"/>
+          </a:xfrm>
+          <a:prstGeom prst="rect">
+            <a:avLst/>
+          </a:prstGeom>
+          <a:noFill/>
+          <a:ln/>
+        </p:spPr>
+        <p:txBody>
+          <a:bodyPr wrap="square" lIns="0" tIns="0" rIns="0" bIns="0" rtlCol="0" anchor="t"/>
+          <a:lstStyle/>
+          <a:p>
+            <a:pPr algn="l" marL="342900" indent="-342900">
+              <a:lnSpc>
+                <a:spcPts val="1620"/>
+              </a:lnSpc>
+              <a:spcAft>
+                <a:spcPts val="300"/>
+              </a:spcAft>
+              <a:buSzPct val="100000"/>
+              <a:buChar char="•"/>
+            </a:pPr>
+            <a:r>
+              <a:rPr lang="en-US" sz="1200" dirty="0">
+                <a:solidFill>
+                  <a:srgbClr val="1A1A1A"/>
+                </a:solidFill>
+                <a:latin typeface="Georgia" pitchFamily="34" charset="0"/>
+                <a:ea typeface="Georgia" pitchFamily="34" charset="-122"/>
+                <a:cs typeface="Georgia" pitchFamily="34" charset="-120"/>
+              </a:rPr>
+              <a:t>Introduction with thesis</a:t>
+            </a:r>
+            <a:endParaRPr lang="en-US" sz="1200" dirty="0"/>
+          </a:p>
+          <a:p>
+            <a:pPr algn="l" marL="342900" indent="-342900">
+              <a:lnSpc>
+                <a:spcPts val="1620"/>
+              </a:lnSpc>
+              <a:spcAft>
+                <a:spcPts val="300"/>
+              </a:spcAft>
+              <a:buSzPct val="100000"/>
+              <a:buChar char="•"/>
+            </a:pPr>
+            <a:r>
+              <a:rPr lang="en-US" sz="1200" dirty="0">
+                <a:solidFill>
+                  <a:srgbClr val="1A1A1A"/>
+                </a:solidFill>
+                <a:latin typeface="Georgia" pitchFamily="34" charset="0"/>
+                <a:ea typeface="Georgia" pitchFamily="34" charset="-122"/>
+                <a:cs typeface="Georgia" pitchFamily="34" charset="-120"/>
+              </a:rPr>
+              <a:t>Section 1</a:t>
+            </a:r>
+            <a:endParaRPr lang="en-US" sz="1200" dirty="0"/>
+          </a:p>
+          <a:p>
+            <a:pPr algn="l" marL="342900" indent="-342900">
+              <a:lnSpc>
+                <a:spcPts val="1620"/>
+              </a:lnSpc>
+              <a:spcAft>
+                <a:spcPts val="300"/>
+              </a:spcAft>
+              <a:buSzPct val="100000"/>
+              <a:buChar char="•"/>
+            </a:pPr>
+            <a:r>
+              <a:rPr lang="en-US" sz="1200" dirty="0">
+                <a:solidFill>
+                  <a:srgbClr val="1A1A1A"/>
+                </a:solidFill>
+                <a:latin typeface="Georgia" pitchFamily="34" charset="0"/>
+                <a:ea typeface="Georgia" pitchFamily="34" charset="-122"/>
+                <a:cs typeface="Georgia" pitchFamily="34" charset="-120"/>
+              </a:rPr>
+              <a:t>Section 2</a:t>
+            </a:r>
+            <a:endParaRPr lang="en-US" sz="1200" dirty="0"/>
+          </a:p>
+          <a:p>
+            <a:pPr algn="l" marL="342900" indent="-342900">
+              <a:lnSpc>
+                <a:spcPts val="1620"/>
+              </a:lnSpc>
+              <a:spcAft>
+                <a:spcPts val="300"/>
+              </a:spcAft>
+              <a:buSzPct val="100000"/>
+              <a:buChar char="•"/>
+            </a:pPr>
+            <a:r>
+              <a:rPr lang="en-US" sz="1200" dirty="0">
+                <a:solidFill>
+                  <a:srgbClr val="1A1A1A"/>
+                </a:solidFill>
+                <a:latin typeface="Georgia" pitchFamily="34" charset="0"/>
+                <a:ea typeface="Georgia" pitchFamily="34" charset="-122"/>
+                <a:cs typeface="Georgia" pitchFamily="34" charset="-120"/>
+              </a:rPr>
+              <a:t>Section 3</a:t>
+            </a:r>
+            <a:endParaRPr lang="en-US" sz="1200" dirty="0"/>
+          </a:p>
+          <a:p>
+            <a:pPr algn="l" marL="342900" indent="-342900">
+              <a:lnSpc>
+                <a:spcPts val="1620"/>
+              </a:lnSpc>
+              <a:spcAft>
+                <a:spcPts val="300"/>
+              </a:spcAft>
+              <a:buSzPct val="100000"/>
+              <a:buChar char="•"/>
+            </a:pPr>
+            <a:r>
+              <a:rPr lang="en-US" sz="1200" dirty="0">
+                <a:solidFill>
+                  <a:srgbClr val="1A1A1A"/>
+                </a:solidFill>
+                <a:latin typeface="Georgia" pitchFamily="34" charset="0"/>
+                <a:ea typeface="Georgia" pitchFamily="34" charset="-122"/>
+                <a:cs typeface="Georgia" pitchFamily="34" charset="-120"/>
+              </a:rPr>
+              <a:t>Counter-argument + response</a:t>
+            </a:r>
+            <a:endParaRPr lang="en-US" sz="1200" dirty="0"/>
+          </a:p>
+          <a:p>
+            <a:pPr algn="l" marL="342900" indent="-342900">
+              <a:lnSpc>
+                <a:spcPts val="1620"/>
+              </a:lnSpc>
+              <a:spcAft>
+                <a:spcPts val="300"/>
+              </a:spcAft>
+              <a:buSzPct val="100000"/>
+              <a:buChar char="•"/>
+            </a:pPr>
+            <a:r>
+              <a:rPr lang="en-US" sz="1200" dirty="0">
+                <a:solidFill>
+                  <a:srgbClr val="1A1A1A"/>
+                </a:solidFill>
+                <a:latin typeface="Georgia" pitchFamily="34" charset="0"/>
+                <a:ea typeface="Georgia" pitchFamily="34" charset="-122"/>
+                <a:cs typeface="Georgia" pitchFamily="34" charset="-120"/>
+              </a:rPr>
+              <a:t>Conclusion</a:t>
+            </a:r>
+            <a:endParaRPr lang="en-US" sz="1200" dirty="0"/>
+          </a:p>
+        </p:txBody>
+      </p:sp>
+      <p:sp>
+        <p:nvSpPr>
+          <p:cNvPr id="6" name="Text 4"/>
           <p:cNvSpPr/>
           <p:nvPr/>
         </p:nvSpPr>
@@ -3696,7 +4175,7 @@
                 <a:ea typeface="Times New Roman" pitchFamily="34" charset="-122"/>
                 <a:cs typeface="Times New Roman" pitchFamily="34" charset="-120"/>
               </a:rPr>
-              <a:t>Homework</a:t>
+              <a:t>Begin drafting (10 min)</a:t>
             </a:r>
             <a:endParaRPr lang="en-US" sz="1800" dirty="0"/>
           </a:p>
@@ -3744,7 +4223,7 @@
                 <a:ea typeface="Georgia" pitchFamily="34" charset="-122"/>
                 <a:cs typeface="Georgia" pitchFamily="34" charset="-120"/>
               </a:rPr>
-              <a:t>– Continue drafting at home. Aim for 1.5–2 pages by tomorrow.</a:t>
+              <a:t>Start the introduction. Don't worry about perfection.</a:t>
             </a:r>
             <a:endParaRPr lang="en-US" sz="1200" dirty="0"/>
           </a:p>
@@ -3902,7 +4381,7 @@
                 <a:ea typeface="Times New Roman" pitchFamily="34" charset="-122"/>
                 <a:cs typeface="Times New Roman" pitchFamily="34" charset="-120"/>
               </a:rPr>
-              <a:t>Differentiation</a:t>
+              <a:t>Homework</a:t>
             </a:r>
             <a:endParaRPr lang="en-US" sz="1800" dirty="0"/>
           </a:p>
@@ -3917,7 +4396,7 @@
         <p:spPr>
           <a:xfrm>
             <a:off x="634901" y="883593"/>
-            <a:ext cx="8102798" cy="525661"/>
+            <a:ext cx="8102798" cy="281880"/>
           </a:xfrm>
           <a:prstGeom prst="rect">
             <a:avLst/>
@@ -3940,7 +4419,7 @@
               <a:buChar char="•"/>
             </a:pPr>
             <a:r>
-              <a:rPr lang="en-US" sz="1200" b="1" dirty="0">
+              <a:rPr lang="en-US" sz="1200" dirty="0">
                 <a:solidFill>
                   <a:srgbClr val="1A1A1A"/>
                 </a:solidFill>
@@ -3948,71 +4427,7 @@
                 <a:ea typeface="Georgia" pitchFamily="34" charset="-122"/>
                 <a:cs typeface="Georgia" pitchFamily="34" charset="-120"/>
               </a:rPr>
-              <a:t>Tier up:</a:t>
-            </a:r>
-            <a:pPr algn="l" indent="0" marL="0">
-              <a:lnSpc>
-                <a:spcPts val="1620"/>
-              </a:lnSpc>
-              <a:spcAft>
-                <a:spcPts val="300"/>
-              </a:spcAft>
-              <a:buNone/>
-            </a:pPr>
-            <a:r>
-              <a:rPr lang="en-US" sz="1200" dirty="0">
-                <a:solidFill>
-                  <a:srgbClr val="1A1A1A"/>
-                </a:solidFill>
-                <a:latin typeface="Georgia" pitchFamily="34" charset="0"/>
-                <a:ea typeface="Georgia" pitchFamily="34" charset="-122"/>
-                <a:cs typeface="Georgia" pitchFamily="34" charset="-120"/>
-              </a:rPr>
-              <a:t> Math track — propose your own algorithm extension (e.g. to multiplication using the same dot logic).</a:t>
-            </a:r>
-            <a:endParaRPr lang="en-US" sz="1200" dirty="0"/>
-          </a:p>
-          <a:p>
-            <a:pPr algn="l" marL="342900" indent="-342900">
-              <a:lnSpc>
-                <a:spcPts val="1620"/>
-              </a:lnSpc>
-              <a:spcAft>
-                <a:spcPts val="300"/>
-              </a:spcAft>
-              <a:buSzPct val="100000"/>
-              <a:buChar char="•"/>
-            </a:pPr>
-            <a:r>
-              <a:rPr lang="en-US" sz="1200" b="1" dirty="0">
-                <a:solidFill>
-                  <a:srgbClr val="1A1A1A"/>
-                </a:solidFill>
-                <a:latin typeface="Georgia" pitchFamily="34" charset="0"/>
-                <a:ea typeface="Georgia" pitchFamily="34" charset="-122"/>
-                <a:cs typeface="Georgia" pitchFamily="34" charset="-120"/>
-              </a:rPr>
-              <a:t>Tier down:</a:t>
-            </a:r>
-            <a:pPr algn="l" indent="0" marL="0">
-              <a:lnSpc>
-                <a:spcPts val="1620"/>
-              </a:lnSpc>
-              <a:spcAft>
-                <a:spcPts val="300"/>
-              </a:spcAft>
-              <a:buNone/>
-            </a:pPr>
-            <a:r>
-              <a:rPr lang="en-US" sz="1200" dirty="0">
-                <a:solidFill>
-                  <a:srgbClr val="1A1A1A"/>
-                </a:solidFill>
-                <a:latin typeface="Georgia" pitchFamily="34" charset="0"/>
-                <a:ea typeface="Georgia" pitchFamily="34" charset="-122"/>
-                <a:cs typeface="Georgia" pitchFamily="34" charset="-120"/>
-              </a:rPr>
-              <a:t> History track — narrow to a single quote from Tirthaji and analyse it deeply.</a:t>
+              <a:t>Continue drafting at home. Aim for 1.5–2 pages by tomorrow.</a:t>
             </a:r>
             <a:endParaRPr lang="en-US" sz="1200" dirty="0"/>
           </a:p>
